--- a/plans/pitch/output/myscoutee_network_pitch.pptx
+++ b/plans/pitch/output/myscoutee_network_pitch.pptx
@@ -69,7 +69,7 @@
         <p:txBody>
           <a:bodyPr/>
           <a:p>
-            <a:fld id="{B84E9902-B317-4B88-A8DB-BFC8F1FED2FC}" type="slidenum">
+            <a:fld id="{18CC40D4-6972-4004-AAB1-D4DF78BAFCE1}" type="slidenum">
               <a:t>&lt;#&gt;</a:t>
             </a:fld>
           </a:p>
@@ -257,7 +257,7 @@
         <p:txBody>
           <a:bodyPr/>
           <a:p>
-            <a:fld id="{270366CE-870E-43D2-A91D-2F44941615D9}" type="slidenum">
+            <a:fld id="{F0EE898A-C94F-40D3-BF6B-47D4BDED44BC}" type="slidenum">
               <a:t>&lt;#&gt;</a:t>
             </a:fld>
           </a:p>
@@ -513,7 +513,7 @@
         <p:txBody>
           <a:bodyPr/>
           <a:p>
-            <a:fld id="{EA71827E-5A27-4686-A756-D090FA8CFE07}" type="slidenum">
+            <a:fld id="{552E2C21-7490-493F-87E2-72092CA57AA6}" type="slidenum">
               <a:t>&lt;#&gt;</a:t>
             </a:fld>
           </a:p>
@@ -837,7 +837,7 @@
         <p:txBody>
           <a:bodyPr/>
           <a:p>
-            <a:fld id="{D9496D7F-B9CB-470F-BFB2-56DC739B984C}" type="slidenum">
+            <a:fld id="{31CBA63C-E223-4F42-A79B-DBFD700CC23A}" type="slidenum">
               <a:t>&lt;#&gt;</a:t>
             </a:fld>
           </a:p>
@@ -994,7 +994,7 @@
         <p:txBody>
           <a:bodyPr/>
           <a:p>
-            <a:fld id="{913E4686-5C41-4934-B907-6081D0FB5576}" type="slidenum">
+            <a:fld id="{39A4E05E-A6A7-4707-B061-5FC8CDDE9DE5}" type="slidenum">
               <a:t>&lt;#&gt;</a:t>
             </a:fld>
           </a:p>
@@ -1148,7 +1148,7 @@
         <p:txBody>
           <a:bodyPr/>
           <a:p>
-            <a:fld id="{43A183AB-F80B-421C-BBB3-93B885B3F08E}" type="slidenum">
+            <a:fld id="{AE71F994-1E29-4128-81BB-3D86FB131D72}" type="slidenum">
               <a:t>&lt;#&gt;</a:t>
             </a:fld>
           </a:p>
@@ -1336,7 +1336,7 @@
         <p:txBody>
           <a:bodyPr/>
           <a:p>
-            <a:fld id="{5EB0D3F1-7BB2-4118-9CA0-17225E4D1B81}" type="slidenum">
+            <a:fld id="{80C6906B-72A8-4072-8927-C27E5750E73D}" type="slidenum">
               <a:t>&lt;#&gt;</a:t>
             </a:fld>
           </a:p>
@@ -1456,7 +1456,7 @@
         <p:txBody>
           <a:bodyPr/>
           <a:p>
-            <a:fld id="{BCAE6979-3DE4-4614-9684-27559857EB45}" type="slidenum">
+            <a:fld id="{E177DF98-42B1-44BE-9D1C-596980674D0E}" type="slidenum">
               <a:t>&lt;#&gt;</a:t>
             </a:fld>
           </a:p>
@@ -1576,7 +1576,7 @@
         <p:txBody>
           <a:bodyPr/>
           <a:p>
-            <a:fld id="{8D995DA6-3BB8-4102-81A4-1F31A962A80E}" type="slidenum">
+            <a:fld id="{642FF49A-03B2-4FE3-A81D-B886CE0CA3DB}" type="slidenum">
               <a:t>&lt;#&gt;</a:t>
             </a:fld>
           </a:p>
@@ -1798,7 +1798,7 @@
         <p:txBody>
           <a:bodyPr/>
           <a:p>
-            <a:fld id="{9C56AFD5-5142-4019-A903-60FD1C6D4B11}" type="slidenum">
+            <a:fld id="{3C7F1C49-05EC-43EF-944A-B4D73DA98DCC}" type="slidenum">
               <a:t>&lt;#&gt;</a:t>
             </a:fld>
           </a:p>
@@ -2020,7 +2020,7 @@
         <p:txBody>
           <a:bodyPr/>
           <a:p>
-            <a:fld id="{96637F20-0DBE-4846-A56B-B231809DB7AB}" type="slidenum">
+            <a:fld id="{A9A5F0DB-3B16-445C-90C0-9C74858AFA38}" type="slidenum">
               <a:t>&lt;#&gt;</a:t>
             </a:fld>
           </a:p>
@@ -2242,7 +2242,7 @@
         <p:txBody>
           <a:bodyPr/>
           <a:p>
-            <a:fld id="{A3C571B5-F6F9-44D2-909F-770E8714487F}" type="slidenum">
+            <a:fld id="{CE89D01E-ACE3-4C4A-A4DF-44FE4AB25E5F}" type="slidenum">
               <a:t>&lt;#&gt;</a:t>
             </a:fld>
           </a:p>
@@ -2654,7 +2654,7 @@
             <a:pPr algn="r">
               <a:buNone/>
             </a:pPr>
-            <a:fld id="{B3CD0F59-B75F-43E3-83F5-D1EB6EE50750}" type="slidenum">
+            <a:fld id="{1D6FA6CA-4DB4-4BE0-B2CE-C3246AF7CF50}" type="slidenum">
               <a:rPr b="0" lang="en-US" sz="1400" spc="-1" strike="noStrike">
                 <a:latin typeface="Times New Roman"/>
               </a:rPr>

--- a/plans/pitch/output/myscoutee_network_pitch.pptx
+++ b/plans/pitch/output/myscoutee_network_pitch.pptx
@@ -69,7 +69,7 @@
         <p:txBody>
           <a:bodyPr/>
           <a:p>
-            <a:fld id="{18CC40D4-6972-4004-AAB1-D4DF78BAFCE1}" type="slidenum">
+            <a:fld id="{AE4BC63E-51E9-447C-82C3-DD5E3198887B}" type="slidenum">
               <a:t>&lt;#&gt;</a:t>
             </a:fld>
           </a:p>
@@ -257,7 +257,7 @@
         <p:txBody>
           <a:bodyPr/>
           <a:p>
-            <a:fld id="{F0EE898A-C94F-40D3-BF6B-47D4BDED44BC}" type="slidenum">
+            <a:fld id="{83853F16-10BE-44DB-85C9-0F2CD50CF0C8}" type="slidenum">
               <a:t>&lt;#&gt;</a:t>
             </a:fld>
           </a:p>
@@ -513,7 +513,7 @@
         <p:txBody>
           <a:bodyPr/>
           <a:p>
-            <a:fld id="{552E2C21-7490-493F-87E2-72092CA57AA6}" type="slidenum">
+            <a:fld id="{BACD49D2-3098-445A-9F56-1CA5C498C274}" type="slidenum">
               <a:t>&lt;#&gt;</a:t>
             </a:fld>
           </a:p>
@@ -837,7 +837,7 @@
         <p:txBody>
           <a:bodyPr/>
           <a:p>
-            <a:fld id="{31CBA63C-E223-4F42-A79B-DBFD700CC23A}" type="slidenum">
+            <a:fld id="{3183258B-E14F-4AFF-8E2E-791CA8DDF6FA}" type="slidenum">
               <a:t>&lt;#&gt;</a:t>
             </a:fld>
           </a:p>
@@ -994,7 +994,7 @@
         <p:txBody>
           <a:bodyPr/>
           <a:p>
-            <a:fld id="{39A4E05E-A6A7-4707-B061-5FC8CDDE9DE5}" type="slidenum">
+            <a:fld id="{C68D2A17-72DE-4680-8F68-86FFE9398CD9}" type="slidenum">
               <a:t>&lt;#&gt;</a:t>
             </a:fld>
           </a:p>
@@ -1148,7 +1148,7 @@
         <p:txBody>
           <a:bodyPr/>
           <a:p>
-            <a:fld id="{AE71F994-1E29-4128-81BB-3D86FB131D72}" type="slidenum">
+            <a:fld id="{594305A6-5BEB-43E9-84E0-C21BF04AE08F}" type="slidenum">
               <a:t>&lt;#&gt;</a:t>
             </a:fld>
           </a:p>
@@ -1336,7 +1336,7 @@
         <p:txBody>
           <a:bodyPr/>
           <a:p>
-            <a:fld id="{80C6906B-72A8-4072-8927-C27E5750E73D}" type="slidenum">
+            <a:fld id="{819F65D7-C3FF-49FD-817B-016E309D333E}" type="slidenum">
               <a:t>&lt;#&gt;</a:t>
             </a:fld>
           </a:p>
@@ -1456,7 +1456,7 @@
         <p:txBody>
           <a:bodyPr/>
           <a:p>
-            <a:fld id="{E177DF98-42B1-44BE-9D1C-596980674D0E}" type="slidenum">
+            <a:fld id="{3C0779AF-A14D-4AEF-A26B-C81076DA292B}" type="slidenum">
               <a:t>&lt;#&gt;</a:t>
             </a:fld>
           </a:p>
@@ -1576,7 +1576,7 @@
         <p:txBody>
           <a:bodyPr/>
           <a:p>
-            <a:fld id="{642FF49A-03B2-4FE3-A81D-B886CE0CA3DB}" type="slidenum">
+            <a:fld id="{1D65339C-B5C1-48A0-8813-1A0B0ED83787}" type="slidenum">
               <a:t>&lt;#&gt;</a:t>
             </a:fld>
           </a:p>
@@ -1798,7 +1798,7 @@
         <p:txBody>
           <a:bodyPr/>
           <a:p>
-            <a:fld id="{3C7F1C49-05EC-43EF-944A-B4D73DA98DCC}" type="slidenum">
+            <a:fld id="{B4F0015B-D414-4A36-9E47-BAA5561C1E5D}" type="slidenum">
               <a:t>&lt;#&gt;</a:t>
             </a:fld>
           </a:p>
@@ -2020,7 +2020,7 @@
         <p:txBody>
           <a:bodyPr/>
           <a:p>
-            <a:fld id="{A9A5F0DB-3B16-445C-90C0-9C74858AFA38}" type="slidenum">
+            <a:fld id="{EB298B84-7260-4A5D-A962-6A82AB279487}" type="slidenum">
               <a:t>&lt;#&gt;</a:t>
             </a:fld>
           </a:p>
@@ -2242,7 +2242,7 @@
         <p:txBody>
           <a:bodyPr/>
           <a:p>
-            <a:fld id="{CE89D01E-ACE3-4C4A-A4DF-44FE4AB25E5F}" type="slidenum">
+            <a:fld id="{252AA757-4697-4287-BFB9-C0B528CAEF76}" type="slidenum">
               <a:t>&lt;#&gt;</a:t>
             </a:fld>
           </a:p>
@@ -2654,7 +2654,7 @@
             <a:pPr algn="r">
               <a:buNone/>
             </a:pPr>
-            <a:fld id="{1D6FA6CA-4DB4-4BE0-B2CE-C3246AF7CF50}" type="slidenum">
+            <a:fld id="{BB4CE49D-C72E-433C-B578-4782A8E19CFF}" type="slidenum">
               <a:rPr b="0" lang="en-US" sz="1400" spc="-1" strike="noStrike">
                 <a:latin typeface="Times New Roman"/>
               </a:rPr>

--- a/plans/pitch/output/myscoutee_network_pitch.pptx
+++ b/plans/pitch/output/myscoutee_network_pitch.pptx
@@ -69,7 +69,7 @@
         <p:txBody>
           <a:bodyPr/>
           <a:p>
-            <a:fld id="{AE4BC63E-51E9-447C-82C3-DD5E3198887B}" type="slidenum">
+            <a:fld id="{569B147E-06E1-4CF5-83A1-2EB99222649E}" type="slidenum">
               <a:t>&lt;#&gt;</a:t>
             </a:fld>
           </a:p>
@@ -257,7 +257,7 @@
         <p:txBody>
           <a:bodyPr/>
           <a:p>
-            <a:fld id="{83853F16-10BE-44DB-85C9-0F2CD50CF0C8}" type="slidenum">
+            <a:fld id="{9F70A009-3236-47C1-A13B-7D9930EF2A41}" type="slidenum">
               <a:t>&lt;#&gt;</a:t>
             </a:fld>
           </a:p>
@@ -513,7 +513,7 @@
         <p:txBody>
           <a:bodyPr/>
           <a:p>
-            <a:fld id="{BACD49D2-3098-445A-9F56-1CA5C498C274}" type="slidenum">
+            <a:fld id="{B97AF41A-C8E2-4271-9FE4-C0E1DBF71F1C}" type="slidenum">
               <a:t>&lt;#&gt;</a:t>
             </a:fld>
           </a:p>
@@ -837,7 +837,7 @@
         <p:txBody>
           <a:bodyPr/>
           <a:p>
-            <a:fld id="{3183258B-E14F-4AFF-8E2E-791CA8DDF6FA}" type="slidenum">
+            <a:fld id="{B2723529-8DC3-4DD0-A8CC-34D7EB7FC083}" type="slidenum">
               <a:t>&lt;#&gt;</a:t>
             </a:fld>
           </a:p>
@@ -994,7 +994,7 @@
         <p:txBody>
           <a:bodyPr/>
           <a:p>
-            <a:fld id="{C68D2A17-72DE-4680-8F68-86FFE9398CD9}" type="slidenum">
+            <a:fld id="{566D02F6-5216-4A16-BAA7-5118B1ED7F80}" type="slidenum">
               <a:t>&lt;#&gt;</a:t>
             </a:fld>
           </a:p>
@@ -1148,7 +1148,7 @@
         <p:txBody>
           <a:bodyPr/>
           <a:p>
-            <a:fld id="{594305A6-5BEB-43E9-84E0-C21BF04AE08F}" type="slidenum">
+            <a:fld id="{8AB1B875-C3CF-4503-A8ED-8A3511B96C92}" type="slidenum">
               <a:t>&lt;#&gt;</a:t>
             </a:fld>
           </a:p>
@@ -1336,7 +1336,7 @@
         <p:txBody>
           <a:bodyPr/>
           <a:p>
-            <a:fld id="{819F65D7-C3FF-49FD-817B-016E309D333E}" type="slidenum">
+            <a:fld id="{5651E300-0432-40A6-8C72-53A5A094C5F1}" type="slidenum">
               <a:t>&lt;#&gt;</a:t>
             </a:fld>
           </a:p>
@@ -1456,7 +1456,7 @@
         <p:txBody>
           <a:bodyPr/>
           <a:p>
-            <a:fld id="{3C0779AF-A14D-4AEF-A26B-C81076DA292B}" type="slidenum">
+            <a:fld id="{621D636C-ADAA-4E54-8331-3424B8615F70}" type="slidenum">
               <a:t>&lt;#&gt;</a:t>
             </a:fld>
           </a:p>
@@ -1576,7 +1576,7 @@
         <p:txBody>
           <a:bodyPr/>
           <a:p>
-            <a:fld id="{1D65339C-B5C1-48A0-8813-1A0B0ED83787}" type="slidenum">
+            <a:fld id="{261E586D-8168-4DB3-AA0F-FD867E7C6B5B}" type="slidenum">
               <a:t>&lt;#&gt;</a:t>
             </a:fld>
           </a:p>
@@ -1798,7 +1798,7 @@
         <p:txBody>
           <a:bodyPr/>
           <a:p>
-            <a:fld id="{B4F0015B-D414-4A36-9E47-BAA5561C1E5D}" type="slidenum">
+            <a:fld id="{891F63DD-6896-4EAD-8F3F-C9614FF517A5}" type="slidenum">
               <a:t>&lt;#&gt;</a:t>
             </a:fld>
           </a:p>
@@ -2020,7 +2020,7 @@
         <p:txBody>
           <a:bodyPr/>
           <a:p>
-            <a:fld id="{EB298B84-7260-4A5D-A962-6A82AB279487}" type="slidenum">
+            <a:fld id="{FCADB6EC-494F-4427-8765-5BCB3C3ABC4B}" type="slidenum">
               <a:t>&lt;#&gt;</a:t>
             </a:fld>
           </a:p>
@@ -2242,7 +2242,7 @@
         <p:txBody>
           <a:bodyPr/>
           <a:p>
-            <a:fld id="{252AA757-4697-4287-BFB9-C0B528CAEF76}" type="slidenum">
+            <a:fld id="{E4738C4A-9974-4A0D-B413-278A923560C2}" type="slidenum">
               <a:t>&lt;#&gt;</a:t>
             </a:fld>
           </a:p>
@@ -2654,7 +2654,7 @@
             <a:pPr algn="r">
               <a:buNone/>
             </a:pPr>
-            <a:fld id="{BB4CE49D-C72E-433C-B578-4782A8E19CFF}" type="slidenum">
+            <a:fld id="{96CAFC62-0436-4EA5-8FF6-1DB2C282388B}" type="slidenum">
               <a:rPr b="0" lang="en-US" sz="1400" spc="-1" strike="noStrike">
                 <a:latin typeface="Times New Roman"/>
               </a:rPr>

--- a/plans/pitch/output/myscoutee_network_pitch.pptx
+++ b/plans/pitch/output/myscoutee_network_pitch.pptx
@@ -69,7 +69,7 @@
         <p:txBody>
           <a:bodyPr/>
           <a:p>
-            <a:fld id="{569B147E-06E1-4CF5-83A1-2EB99222649E}" type="slidenum">
+            <a:fld id="{EA274450-2339-4B85-8575-79838227C0D3}" type="slidenum">
               <a:t>&lt;#&gt;</a:t>
             </a:fld>
           </a:p>
@@ -257,7 +257,7 @@
         <p:txBody>
           <a:bodyPr/>
           <a:p>
-            <a:fld id="{9F70A009-3236-47C1-A13B-7D9930EF2A41}" type="slidenum">
+            <a:fld id="{4367E438-C47C-4C39-A0CB-4D334DE292DF}" type="slidenum">
               <a:t>&lt;#&gt;</a:t>
             </a:fld>
           </a:p>
@@ -513,7 +513,7 @@
         <p:txBody>
           <a:bodyPr/>
           <a:p>
-            <a:fld id="{B97AF41A-C8E2-4271-9FE4-C0E1DBF71F1C}" type="slidenum">
+            <a:fld id="{83576FF9-57FA-4517-A622-7869983025C5}" type="slidenum">
               <a:t>&lt;#&gt;</a:t>
             </a:fld>
           </a:p>
@@ -837,7 +837,7 @@
         <p:txBody>
           <a:bodyPr/>
           <a:p>
-            <a:fld id="{B2723529-8DC3-4DD0-A8CC-34D7EB7FC083}" type="slidenum">
+            <a:fld id="{8E3B5A12-0510-4799-9285-AB9B900BC0AC}" type="slidenum">
               <a:t>&lt;#&gt;</a:t>
             </a:fld>
           </a:p>
@@ -994,7 +994,7 @@
         <p:txBody>
           <a:bodyPr/>
           <a:p>
-            <a:fld id="{566D02F6-5216-4A16-BAA7-5118B1ED7F80}" type="slidenum">
+            <a:fld id="{2893EA01-00BC-4A7A-BD52-C39B475514C6}" type="slidenum">
               <a:t>&lt;#&gt;</a:t>
             </a:fld>
           </a:p>
@@ -1148,7 +1148,7 @@
         <p:txBody>
           <a:bodyPr/>
           <a:p>
-            <a:fld id="{8AB1B875-C3CF-4503-A8ED-8A3511B96C92}" type="slidenum">
+            <a:fld id="{C042E7BB-4327-451B-A85E-FA1E6A6BD297}" type="slidenum">
               <a:t>&lt;#&gt;</a:t>
             </a:fld>
           </a:p>
@@ -1336,7 +1336,7 @@
         <p:txBody>
           <a:bodyPr/>
           <a:p>
-            <a:fld id="{5651E300-0432-40A6-8C72-53A5A094C5F1}" type="slidenum">
+            <a:fld id="{895668CD-E78F-44B4-9374-C07A085CC7C1}" type="slidenum">
               <a:t>&lt;#&gt;</a:t>
             </a:fld>
           </a:p>
@@ -1456,7 +1456,7 @@
         <p:txBody>
           <a:bodyPr/>
           <a:p>
-            <a:fld id="{621D636C-ADAA-4E54-8331-3424B8615F70}" type="slidenum">
+            <a:fld id="{969B4966-9CBE-456C-8ED5-84935ACD91EC}" type="slidenum">
               <a:t>&lt;#&gt;</a:t>
             </a:fld>
           </a:p>
@@ -1576,7 +1576,7 @@
         <p:txBody>
           <a:bodyPr/>
           <a:p>
-            <a:fld id="{261E586D-8168-4DB3-AA0F-FD867E7C6B5B}" type="slidenum">
+            <a:fld id="{F889E64F-132A-4344-B340-87B50E9ABA73}" type="slidenum">
               <a:t>&lt;#&gt;</a:t>
             </a:fld>
           </a:p>
@@ -1798,7 +1798,7 @@
         <p:txBody>
           <a:bodyPr/>
           <a:p>
-            <a:fld id="{891F63DD-6896-4EAD-8F3F-C9614FF517A5}" type="slidenum">
+            <a:fld id="{51281DED-226F-46E1-B6BA-79A251B3539F}" type="slidenum">
               <a:t>&lt;#&gt;</a:t>
             </a:fld>
           </a:p>
@@ -2020,7 +2020,7 @@
         <p:txBody>
           <a:bodyPr/>
           <a:p>
-            <a:fld id="{FCADB6EC-494F-4427-8765-5BCB3C3ABC4B}" type="slidenum">
+            <a:fld id="{2987EBBE-3DCF-4A04-9C10-3DCC5F2A990E}" type="slidenum">
               <a:t>&lt;#&gt;</a:t>
             </a:fld>
           </a:p>
@@ -2242,7 +2242,7 @@
         <p:txBody>
           <a:bodyPr/>
           <a:p>
-            <a:fld id="{E4738C4A-9974-4A0D-B413-278A923560C2}" type="slidenum">
+            <a:fld id="{A66CC3B4-E84F-4D8D-A151-DFF318FD55FF}" type="slidenum">
               <a:t>&lt;#&gt;</a:t>
             </a:fld>
           </a:p>
@@ -2654,7 +2654,7 @@
             <a:pPr algn="r">
               <a:buNone/>
             </a:pPr>
-            <a:fld id="{96CAFC62-0436-4EA5-8FF6-1DB2C282388B}" type="slidenum">
+            <a:fld id="{7DB99BE9-95CF-4996-A3C2-CA185DFFD792}" type="slidenum">
               <a:rPr b="0" lang="en-US" sz="1400" spc="-1" strike="noStrike">
                 <a:latin typeface="Times New Roman"/>
               </a:rPr>

--- a/plans/pitch/output/myscoutee_network_pitch.pptx
+++ b/plans/pitch/output/myscoutee_network_pitch.pptx
@@ -69,7 +69,7 @@
         <p:txBody>
           <a:bodyPr/>
           <a:p>
-            <a:fld id="{EA274450-2339-4B85-8575-79838227C0D3}" type="slidenum">
+            <a:fld id="{9DD5DFCC-E7B2-4DBF-9D41-8DFF290269B3}" type="slidenum">
               <a:t>&lt;#&gt;</a:t>
             </a:fld>
           </a:p>
@@ -257,7 +257,7 @@
         <p:txBody>
           <a:bodyPr/>
           <a:p>
-            <a:fld id="{4367E438-C47C-4C39-A0CB-4D334DE292DF}" type="slidenum">
+            <a:fld id="{621F7C3A-229A-480C-84B6-51DE3FC18C12}" type="slidenum">
               <a:t>&lt;#&gt;</a:t>
             </a:fld>
           </a:p>
@@ -513,7 +513,7 @@
         <p:txBody>
           <a:bodyPr/>
           <a:p>
-            <a:fld id="{83576FF9-57FA-4517-A622-7869983025C5}" type="slidenum">
+            <a:fld id="{CCD0D93F-1AEE-4731-B574-012783CCC41A}" type="slidenum">
               <a:t>&lt;#&gt;</a:t>
             </a:fld>
           </a:p>
@@ -837,7 +837,7 @@
         <p:txBody>
           <a:bodyPr/>
           <a:p>
-            <a:fld id="{8E3B5A12-0510-4799-9285-AB9B900BC0AC}" type="slidenum">
+            <a:fld id="{93FEA729-CD53-4728-A1CA-EA130592E5B5}" type="slidenum">
               <a:t>&lt;#&gt;</a:t>
             </a:fld>
           </a:p>
@@ -994,7 +994,7 @@
         <p:txBody>
           <a:bodyPr/>
           <a:p>
-            <a:fld id="{2893EA01-00BC-4A7A-BD52-C39B475514C6}" type="slidenum">
+            <a:fld id="{C25CB8B1-8968-4B0A-8339-EC086764078B}" type="slidenum">
               <a:t>&lt;#&gt;</a:t>
             </a:fld>
           </a:p>
@@ -1148,7 +1148,7 @@
         <p:txBody>
           <a:bodyPr/>
           <a:p>
-            <a:fld id="{C042E7BB-4327-451B-A85E-FA1E6A6BD297}" type="slidenum">
+            <a:fld id="{037AA753-50BA-4439-95B0-8E51E14E20BB}" type="slidenum">
               <a:t>&lt;#&gt;</a:t>
             </a:fld>
           </a:p>
@@ -1336,7 +1336,7 @@
         <p:txBody>
           <a:bodyPr/>
           <a:p>
-            <a:fld id="{895668CD-E78F-44B4-9374-C07A085CC7C1}" type="slidenum">
+            <a:fld id="{43FC8206-950C-4E6B-A342-410844DB09E3}" type="slidenum">
               <a:t>&lt;#&gt;</a:t>
             </a:fld>
           </a:p>
@@ -1456,7 +1456,7 @@
         <p:txBody>
           <a:bodyPr/>
           <a:p>
-            <a:fld id="{969B4966-9CBE-456C-8ED5-84935ACD91EC}" type="slidenum">
+            <a:fld id="{E8493E6E-298A-49FA-946E-A2BEC4D0F4F0}" type="slidenum">
               <a:t>&lt;#&gt;</a:t>
             </a:fld>
           </a:p>
@@ -1576,7 +1576,7 @@
         <p:txBody>
           <a:bodyPr/>
           <a:p>
-            <a:fld id="{F889E64F-132A-4344-B340-87B50E9ABA73}" type="slidenum">
+            <a:fld id="{137AF365-EAB8-42CC-B584-F8A8F60F5D19}" type="slidenum">
               <a:t>&lt;#&gt;</a:t>
             </a:fld>
           </a:p>
@@ -1798,7 +1798,7 @@
         <p:txBody>
           <a:bodyPr/>
           <a:p>
-            <a:fld id="{51281DED-226F-46E1-B6BA-79A251B3539F}" type="slidenum">
+            <a:fld id="{B9F5E456-97E0-4060-AE18-709AA87C7215}" type="slidenum">
               <a:t>&lt;#&gt;</a:t>
             </a:fld>
           </a:p>
@@ -2020,7 +2020,7 @@
         <p:txBody>
           <a:bodyPr/>
           <a:p>
-            <a:fld id="{2987EBBE-3DCF-4A04-9C10-3DCC5F2A990E}" type="slidenum">
+            <a:fld id="{B3BFFC6E-D067-4149-A3DC-1DD7702C25B5}" type="slidenum">
               <a:t>&lt;#&gt;</a:t>
             </a:fld>
           </a:p>
@@ -2242,7 +2242,7 @@
         <p:txBody>
           <a:bodyPr/>
           <a:p>
-            <a:fld id="{A66CC3B4-E84F-4D8D-A151-DFF318FD55FF}" type="slidenum">
+            <a:fld id="{8D2DFCA6-8ADD-4C4B-8116-763BE97D4BFB}" type="slidenum">
               <a:t>&lt;#&gt;</a:t>
             </a:fld>
           </a:p>
@@ -2654,7 +2654,7 @@
             <a:pPr algn="r">
               <a:buNone/>
             </a:pPr>
-            <a:fld id="{7DB99BE9-95CF-4996-A3C2-CA185DFFD792}" type="slidenum">
+            <a:fld id="{AFA8E22E-BA44-4E5B-98B3-EF01B23D8A9B}" type="slidenum">
               <a:rPr b="0" lang="en-US" sz="1400" spc="-1" strike="noStrike">
                 <a:latin typeface="Times New Roman"/>
               </a:rPr>

--- a/plans/pitch/output/myscoutee_network_pitch.pptx
+++ b/plans/pitch/output/myscoutee_network_pitch.pptx
@@ -69,7 +69,7 @@
         <p:txBody>
           <a:bodyPr/>
           <a:p>
-            <a:fld id="{9DD5DFCC-E7B2-4DBF-9D41-8DFF290269B3}" type="slidenum">
+            <a:fld id="{F69ED832-67E2-4534-855D-8B3005F643BD}" type="slidenum">
               <a:t>&lt;#&gt;</a:t>
             </a:fld>
           </a:p>
@@ -257,7 +257,7 @@
         <p:txBody>
           <a:bodyPr/>
           <a:p>
-            <a:fld id="{621F7C3A-229A-480C-84B6-51DE3FC18C12}" type="slidenum">
+            <a:fld id="{F5BB22AF-A5BA-40D7-A965-DAE5FE2EBAE7}" type="slidenum">
               <a:t>&lt;#&gt;</a:t>
             </a:fld>
           </a:p>
@@ -513,7 +513,7 @@
         <p:txBody>
           <a:bodyPr/>
           <a:p>
-            <a:fld id="{CCD0D93F-1AEE-4731-B574-012783CCC41A}" type="slidenum">
+            <a:fld id="{975615F6-D0A3-4797-A7F9-39F3C4D15627}" type="slidenum">
               <a:t>&lt;#&gt;</a:t>
             </a:fld>
           </a:p>
@@ -837,7 +837,7 @@
         <p:txBody>
           <a:bodyPr/>
           <a:p>
-            <a:fld id="{93FEA729-CD53-4728-A1CA-EA130592E5B5}" type="slidenum">
+            <a:fld id="{8A6280B2-9B2C-4916-AC9F-A95567742B99}" type="slidenum">
               <a:t>&lt;#&gt;</a:t>
             </a:fld>
           </a:p>
@@ -994,7 +994,7 @@
         <p:txBody>
           <a:bodyPr/>
           <a:p>
-            <a:fld id="{C25CB8B1-8968-4B0A-8339-EC086764078B}" type="slidenum">
+            <a:fld id="{9D90D4EB-8894-4924-BEFC-C33BD9445D84}" type="slidenum">
               <a:t>&lt;#&gt;</a:t>
             </a:fld>
           </a:p>
@@ -1148,7 +1148,7 @@
         <p:txBody>
           <a:bodyPr/>
           <a:p>
-            <a:fld id="{037AA753-50BA-4439-95B0-8E51E14E20BB}" type="slidenum">
+            <a:fld id="{2725F1CE-AC09-48BF-8F24-D0206B0EECC2}" type="slidenum">
               <a:t>&lt;#&gt;</a:t>
             </a:fld>
           </a:p>
@@ -1336,7 +1336,7 @@
         <p:txBody>
           <a:bodyPr/>
           <a:p>
-            <a:fld id="{43FC8206-950C-4E6B-A342-410844DB09E3}" type="slidenum">
+            <a:fld id="{D374057A-605A-488D-9BD6-2AC665ED5C30}" type="slidenum">
               <a:t>&lt;#&gt;</a:t>
             </a:fld>
           </a:p>
@@ -1456,7 +1456,7 @@
         <p:txBody>
           <a:bodyPr/>
           <a:p>
-            <a:fld id="{E8493E6E-298A-49FA-946E-A2BEC4D0F4F0}" type="slidenum">
+            <a:fld id="{0AB6F795-A722-4C9C-AEBA-10E8C4BD2069}" type="slidenum">
               <a:t>&lt;#&gt;</a:t>
             </a:fld>
           </a:p>
@@ -1576,7 +1576,7 @@
         <p:txBody>
           <a:bodyPr/>
           <a:p>
-            <a:fld id="{137AF365-EAB8-42CC-B584-F8A8F60F5D19}" type="slidenum">
+            <a:fld id="{F6DF14B5-0AD9-4569-95D6-C88772BC1F3E}" type="slidenum">
               <a:t>&lt;#&gt;</a:t>
             </a:fld>
           </a:p>
@@ -1798,7 +1798,7 @@
         <p:txBody>
           <a:bodyPr/>
           <a:p>
-            <a:fld id="{B9F5E456-97E0-4060-AE18-709AA87C7215}" type="slidenum">
+            <a:fld id="{5B4CC3A8-F1F9-4865-BFF8-F0CD389542EE}" type="slidenum">
               <a:t>&lt;#&gt;</a:t>
             </a:fld>
           </a:p>
@@ -2020,7 +2020,7 @@
         <p:txBody>
           <a:bodyPr/>
           <a:p>
-            <a:fld id="{B3BFFC6E-D067-4149-A3DC-1DD7702C25B5}" type="slidenum">
+            <a:fld id="{A50410D8-4E17-4CAF-8760-9F77A844E2EC}" type="slidenum">
               <a:t>&lt;#&gt;</a:t>
             </a:fld>
           </a:p>
@@ -2242,7 +2242,7 @@
         <p:txBody>
           <a:bodyPr/>
           <a:p>
-            <a:fld id="{8D2DFCA6-8ADD-4C4B-8116-763BE97D4BFB}" type="slidenum">
+            <a:fld id="{6318C235-0306-4F57-8C46-660B75E6DEDF}" type="slidenum">
               <a:t>&lt;#&gt;</a:t>
             </a:fld>
           </a:p>
@@ -2654,7 +2654,7 @@
             <a:pPr algn="r">
               <a:buNone/>
             </a:pPr>
-            <a:fld id="{AFA8E22E-BA44-4E5B-98B3-EF01B23D8A9B}" type="slidenum">
+            <a:fld id="{9EB019CE-9033-4BE2-8FF5-A957454506CD}" type="slidenum">
               <a:rPr b="0" lang="en-US" sz="1400" spc="-1" strike="noStrike">
                 <a:latin typeface="Times New Roman"/>
               </a:rPr>

--- a/plans/pitch/output/myscoutee_network_pitch.pptx
+++ b/plans/pitch/output/myscoutee_network_pitch.pptx
@@ -69,7 +69,7 @@
         <p:txBody>
           <a:bodyPr/>
           <a:p>
-            <a:fld id="{EA274450-2339-4B85-8575-79838227C0D3}" type="slidenum">
+            <a:fld id="{F69ED832-67E2-4534-855D-8B3005F643BD}" type="slidenum">
               <a:t>&lt;#&gt;</a:t>
             </a:fld>
           </a:p>
@@ -257,7 +257,7 @@
         <p:txBody>
           <a:bodyPr/>
           <a:p>
-            <a:fld id="{4367E438-C47C-4C39-A0CB-4D334DE292DF}" type="slidenum">
+            <a:fld id="{F5BB22AF-A5BA-40D7-A965-DAE5FE2EBAE7}" type="slidenum">
               <a:t>&lt;#&gt;</a:t>
             </a:fld>
           </a:p>
@@ -513,7 +513,7 @@
         <p:txBody>
           <a:bodyPr/>
           <a:p>
-            <a:fld id="{83576FF9-57FA-4517-A622-7869983025C5}" type="slidenum">
+            <a:fld id="{975615F6-D0A3-4797-A7F9-39F3C4D15627}" type="slidenum">
               <a:t>&lt;#&gt;</a:t>
             </a:fld>
           </a:p>
@@ -837,7 +837,7 @@
         <p:txBody>
           <a:bodyPr/>
           <a:p>
-            <a:fld id="{8E3B5A12-0510-4799-9285-AB9B900BC0AC}" type="slidenum">
+            <a:fld id="{8A6280B2-9B2C-4916-AC9F-A95567742B99}" type="slidenum">
               <a:t>&lt;#&gt;</a:t>
             </a:fld>
           </a:p>
@@ -994,7 +994,7 @@
         <p:txBody>
           <a:bodyPr/>
           <a:p>
-            <a:fld id="{2893EA01-00BC-4A7A-BD52-C39B475514C6}" type="slidenum">
+            <a:fld id="{9D90D4EB-8894-4924-BEFC-C33BD9445D84}" type="slidenum">
               <a:t>&lt;#&gt;</a:t>
             </a:fld>
           </a:p>
@@ -1148,7 +1148,7 @@
         <p:txBody>
           <a:bodyPr/>
           <a:p>
-            <a:fld id="{C042E7BB-4327-451B-A85E-FA1E6A6BD297}" type="slidenum">
+            <a:fld id="{2725F1CE-AC09-48BF-8F24-D0206B0EECC2}" type="slidenum">
               <a:t>&lt;#&gt;</a:t>
             </a:fld>
           </a:p>
@@ -1336,7 +1336,7 @@
         <p:txBody>
           <a:bodyPr/>
           <a:p>
-            <a:fld id="{895668CD-E78F-44B4-9374-C07A085CC7C1}" type="slidenum">
+            <a:fld id="{D374057A-605A-488D-9BD6-2AC665ED5C30}" type="slidenum">
               <a:t>&lt;#&gt;</a:t>
             </a:fld>
           </a:p>
@@ -1456,7 +1456,7 @@
         <p:txBody>
           <a:bodyPr/>
           <a:p>
-            <a:fld id="{969B4966-9CBE-456C-8ED5-84935ACD91EC}" type="slidenum">
+            <a:fld id="{0AB6F795-A722-4C9C-AEBA-10E8C4BD2069}" type="slidenum">
               <a:t>&lt;#&gt;</a:t>
             </a:fld>
           </a:p>
@@ -1576,7 +1576,7 @@
         <p:txBody>
           <a:bodyPr/>
           <a:p>
-            <a:fld id="{F889E64F-132A-4344-B340-87B50E9ABA73}" type="slidenum">
+            <a:fld id="{F6DF14B5-0AD9-4569-95D6-C88772BC1F3E}" type="slidenum">
               <a:t>&lt;#&gt;</a:t>
             </a:fld>
           </a:p>
@@ -1798,7 +1798,7 @@
         <p:txBody>
           <a:bodyPr/>
           <a:p>
-            <a:fld id="{51281DED-226F-46E1-B6BA-79A251B3539F}" type="slidenum">
+            <a:fld id="{5B4CC3A8-F1F9-4865-BFF8-F0CD389542EE}" type="slidenum">
               <a:t>&lt;#&gt;</a:t>
             </a:fld>
           </a:p>
@@ -2020,7 +2020,7 @@
         <p:txBody>
           <a:bodyPr/>
           <a:p>
-            <a:fld id="{2987EBBE-3DCF-4A04-9C10-3DCC5F2A990E}" type="slidenum">
+            <a:fld id="{A50410D8-4E17-4CAF-8760-9F77A844E2EC}" type="slidenum">
               <a:t>&lt;#&gt;</a:t>
             </a:fld>
           </a:p>
@@ -2242,7 +2242,7 @@
         <p:txBody>
           <a:bodyPr/>
           <a:p>
-            <a:fld id="{A66CC3B4-E84F-4D8D-A151-DFF318FD55FF}" type="slidenum">
+            <a:fld id="{6318C235-0306-4F57-8C46-660B75E6DEDF}" type="slidenum">
               <a:t>&lt;#&gt;</a:t>
             </a:fld>
           </a:p>
@@ -2654,7 +2654,7 @@
             <a:pPr algn="r">
               <a:buNone/>
             </a:pPr>
-            <a:fld id="{7DB99BE9-95CF-4996-A3C2-CA185DFFD792}" type="slidenum">
+            <a:fld id="{9EB019CE-9033-4BE2-8FF5-A957454506CD}" type="slidenum">
               <a:rPr b="0" lang="en-US" sz="1400" spc="-1" strike="noStrike">
                 <a:latin typeface="Times New Roman"/>
               </a:rPr>
